--- a/04_VOIS_Major_Project_PPT_Submission_Template (2).pptx
+++ b/04_VOIS_Major_Project_PPT_Submission_Template (2).pptx
@@ -24443,6 +24443,63 @@
               <a:ea typeface="Trebuchet MS"/>
               <a:cs typeface="Trebuchet MS"/>
               <a:sym typeface="Trebuchet MS"/>
+            </a:endParaRPr>
+          </a:p>
+        </p:txBody>
+      </p:sp>
+      <p:sp>
+        <p:nvSpPr>
+          <p:cNvPr id="5" name="TextBox 4">
+            <a:extLst>
+              <a:ext uri="{FF2B5EF4-FFF2-40B4-BE49-F238E27FC236}">
+                <a16:creationId xmlns:a16="http://schemas.microsoft.com/office/drawing/2014/main" id="{AA00BE57-BBC6-F1F3-3C15-34E6C08235F7}"/>
+              </a:ext>
+            </a:extLst>
+          </p:cNvPr>
+          <p:cNvSpPr txBox="1"/>
+          <p:nvPr/>
+        </p:nvSpPr>
+        <p:spPr>
+          <a:xfrm>
+            <a:off x="995450" y="3128309"/>
+            <a:ext cx="8281554" cy="338554"/>
+          </a:xfrm>
+          <a:prstGeom prst="rect">
+            <a:avLst/>
+          </a:prstGeom>
+          <a:noFill/>
+        </p:spPr>
+        <p:txBody>
+          <a:bodyPr wrap="square">
+            <a:spAutoFit/>
+          </a:bodyPr>
+          <a:lstStyle/>
+          <a:p>
+            <a:r>
+              <a:rPr lang="en-IN" sz="1600" dirty="0">
+                <a:solidFill>
+                  <a:schemeClr val="tx1">
+                    <a:lumMod val="95000"/>
+                    <a:lumOff val="5000"/>
+                  </a:schemeClr>
+                </a:solidFill>
+                <a:hlinkClick r:id="rId4">
+                  <a:extLst>
+                    <a:ext uri="{A12FA001-AC4F-418D-AE19-62706E023703}">
+                      <ahyp:hlinkClr xmlns:ahyp="http://schemas.microsoft.com/office/drawing/2018/hyperlinkcolor" val="tx"/>
+                    </a:ext>
+                  </a:extLst>
+                </a:hlinkClick>
+              </a:rPr>
+              <a:t>https://github.com/apoorva-venkata/Seasonal_Agriculture_Performance_Analysis.git</a:t>
+            </a:r>
+            <a:endParaRPr lang="en-IN" sz="1600" dirty="0">
+              <a:solidFill>
+                <a:schemeClr val="tx1">
+                  <a:lumMod val="95000"/>
+                  <a:lumOff val="5000"/>
+                </a:schemeClr>
+              </a:solidFill>
             </a:endParaRPr>
           </a:p>
         </p:txBody>
